--- a/kyriba-transformation/presentation/kyriba-transformation.pptx
+++ b/kyriba-transformation/presentation/kyriba-transformation.pptx
@@ -3293,7 +3293,7 @@
         <p:spPr>
           <a:xfrm rot="0">
             <a:off x="1028700" y="7406440"/>
-            <a:ext cx="7471829" cy="1475423"/>
+            <a:ext cx="7471829" cy="1063600"/>
           </a:xfrm>
           <a:prstGeom prst="rect">
             <a:avLst/>
@@ -3320,7 +3320,7 @@
                 <a:cs typeface="Poppins"/>
                 <a:sym typeface="Poppins"/>
               </a:rPr>
-              <a:t>Executive overview highlighting full Kyriba implementation, technical analysis of consultant configurations, Open API integration with centralized data platform and accounting ERP integration.</a:t>
+              <a:t>Executive overview highlighting full Kyriba implementation, functional analysis of solution design, Open API integration with the centralised data platform and ERP integration.</a:t>
             </a:r>
           </a:p>
         </p:txBody>
@@ -3818,7 +3818,7 @@
         <p:spPr>
           <a:xfrm rot="0">
             <a:off x="1866258" y="5205460"/>
-            <a:ext cx="6750809" cy="1063717"/>
+            <a:ext cx="6750809" cy="1063650"/>
           </a:xfrm>
           <a:prstGeom prst="rect">
             <a:avLst/>
@@ -3857,7 +3857,7 @@
                 <a:cs typeface="Poppins"/>
                 <a:sym typeface="Poppins"/>
               </a:rPr>
-              <a:t>user types: as an example Client User, Treasury User, Admin User or View-Only User</a:t>
+              <a:t>user types: for example, Client User, Treasury User, Admin User or View-Only-User</a:t>
             </a:r>
           </a:p>
         </p:txBody>
@@ -4925,7 +4925,7 @@
         <p:spPr>
           <a:xfrm rot="0">
             <a:off x="1028700" y="1219200"/>
-            <a:ext cx="13917940" cy="2474024"/>
+            <a:ext cx="13917940" cy="2473936"/>
           </a:xfrm>
           <a:prstGeom prst="rect">
             <a:avLst/>
@@ -8731,6 +8731,18 @@
               </a:lnSpc>
             </a:pPr>
             <a:r>
+              <a:rPr lang="en-US" sz="1899" b="true">
+                <a:solidFill>
+                  <a:srgbClr val="EFF1E8"/>
+                </a:solidFill>
+                <a:latin typeface="Poppins Bold"/>
+                <a:ea typeface="Poppins Bold"/>
+                <a:cs typeface="Poppins Bold"/>
+                <a:sym typeface="Poppins Bold"/>
+              </a:rPr>
+              <a:t>Set up and validated bank connectivity</a:t>
+            </a:r>
+            <a:r>
               <a:rPr lang="en-US" sz="1899">
                 <a:solidFill>
                   <a:srgbClr val="EFF1E8"/>
@@ -8740,7 +8752,7 @@
                 <a:cs typeface="Poppins"/>
                 <a:sym typeface="Poppins"/>
               </a:rPr>
-              <a:t>Worked with banks and implementation team to set up connectivity and validate configuration; tested statement delivery, format and transaction information</a:t>
+              <a:t> with banks and the implementation team; tested statement delivery, format and transaction information.</a:t>
             </a:r>
           </a:p>
         </p:txBody>
@@ -8880,7 +8892,7 @@
         </p:nvSpPr>
         <p:spPr>
           <a:xfrm rot="0">
-            <a:off x="2193588" y="6056620"/>
+            <a:off x="2193588" y="5971444"/>
             <a:ext cx="3535071" cy="675617"/>
           </a:xfrm>
           <a:prstGeom prst="rect">
@@ -9061,7 +9073,7 @@
                 <a:cs typeface="Poppins"/>
                 <a:sym typeface="Poppins"/>
               </a:rPr>
-              <a:t>Supported payment connectivity setup and testing; executed test payments and validated bank transmission, responses and payment status</a:t>
+              <a:t>Supported payment connectivity setup and testing; executed test payments and validated bank transmission, responses and payment status.</a:t>
             </a:r>
           </a:p>
         </p:txBody>
@@ -9382,7 +9394,7 @@
                 <a:cs typeface="Poppins"/>
                 <a:sym typeface="Poppins"/>
               </a:rPr>
-              <a:t>Configured and validated BTC mappings and reconciliation rules; monitored the Bank Connectivity Cockpit, investigated breaks and tested matching behaviour.</a:t>
+              <a:t>Configured BTC mappings and reconciliation rules; monitored the Bank Connectivity Cockpit, investigated breaks and tested matching behaviour.</a:t>
             </a:r>
           </a:p>
         </p:txBody>
@@ -9455,7 +9467,7 @@
                 <a:cs typeface="Montserrat Bold"/>
                 <a:sym typeface="Montserrat Bold"/>
               </a:rPr>
-              <a:t>Tade Management</a:t>
+              <a:t>Trade Management</a:t>
             </a:r>
           </a:p>
         </p:txBody>
@@ -10134,7 +10146,55 @@
                 <a:cs typeface="Poppins"/>
                 <a:sym typeface="Poppins"/>
               </a:rPr>
-              <a:t>Worked across Kyriba and the MMF platform provider to validate the connectivity, tested trades and confirmed the end-to-end processing.</a:t>
+              <a:t>Coordinated with Kyriba and the Money Market Funds platform provider to </a:t>
+            </a:r>
+            <a:r>
+              <a:rPr lang="en-US" sz="1899" b="true">
+                <a:solidFill>
+                  <a:srgbClr val="EFF1E8"/>
+                </a:solidFill>
+                <a:latin typeface="Poppins Bold"/>
+                <a:ea typeface="Poppins Bold"/>
+                <a:cs typeface="Poppins Bold"/>
+                <a:sym typeface="Poppins Bold"/>
+              </a:rPr>
+              <a:t>validate</a:t>
+            </a:r>
+            <a:r>
+              <a:rPr lang="en-US" sz="1899">
+                <a:solidFill>
+                  <a:srgbClr val="EFF1E8"/>
+                </a:solidFill>
+                <a:latin typeface="Poppins"/>
+                <a:ea typeface="Poppins"/>
+                <a:cs typeface="Poppins"/>
+                <a:sym typeface="Poppins"/>
+              </a:rPr>
+              <a:t> the connectivity, tested trades and confirmed the </a:t>
+            </a:r>
+            <a:r>
+              <a:rPr lang="en-US" sz="1899" b="true">
+                <a:solidFill>
+                  <a:srgbClr val="EFF1E8"/>
+                </a:solidFill>
+                <a:latin typeface="Poppins Bold"/>
+                <a:ea typeface="Poppins Bold"/>
+                <a:cs typeface="Poppins Bold"/>
+                <a:sym typeface="Poppins Bold"/>
+              </a:rPr>
+              <a:t>end-to-end processing</a:t>
+            </a:r>
+            <a:r>
+              <a:rPr lang="en-US" sz="1899">
+                <a:solidFill>
+                  <a:srgbClr val="EFF1E8"/>
+                </a:solidFill>
+                <a:latin typeface="Poppins"/>
+                <a:ea typeface="Poppins"/>
+                <a:cs typeface="Poppins"/>
+                <a:sym typeface="Poppins"/>
+              </a:rPr>
+              <a:t>.</a:t>
             </a:r>
           </a:p>
         </p:txBody>
@@ -10446,6 +10506,18 @@
               </a:lnSpc>
             </a:pPr>
             <a:r>
+              <a:rPr lang="en-US" sz="1899" b="true">
+                <a:solidFill>
+                  <a:srgbClr val="EFF1E8"/>
+                </a:solidFill>
+                <a:latin typeface="Poppins Bold"/>
+                <a:ea typeface="Poppins Bold"/>
+                <a:cs typeface="Poppins Bold"/>
+                <a:sym typeface="Poppins Bold"/>
+              </a:rPr>
+              <a:t>Defined and validated manual trade-entry requirements</a:t>
+            </a:r>
+            <a:r>
               <a:rPr lang="en-US" sz="1899">
                 <a:solidFill>
                   <a:srgbClr val="EFF1E8"/>
@@ -10455,7 +10527,7 @@
                 <a:cs typeface="Poppins"/>
                 <a:sym typeface="Poppins"/>
               </a:rPr>
-              <a:t>Defined and validated manual trade-entry requirements for transactions initiated by internal Treasury users; tested capture, processing and downstream behaviour</a:t>
+              <a:t> for transactions initiated by internal Treasury users; tested capture, processing and downstream behaviour.</a:t>
             </a:r>
           </a:p>
         </p:txBody>
@@ -10767,6 +10839,18 @@
               </a:lnSpc>
             </a:pPr>
             <a:r>
+              <a:rPr lang="en-US" sz="1899" b="true">
+                <a:solidFill>
+                  <a:srgbClr val="EFF1E8"/>
+                </a:solidFill>
+                <a:latin typeface="Poppins Bold"/>
+                <a:ea typeface="Poppins Bold"/>
+                <a:cs typeface="Poppins Bold"/>
+                <a:sym typeface="Poppins Bold"/>
+              </a:rPr>
+              <a:t>Established transaction-specific requirements </a:t>
+            </a:r>
+            <a:r>
               <a:rPr lang="en-US" sz="1899">
                 <a:solidFill>
                   <a:srgbClr val="EFF1E8"/>
@@ -10776,7 +10860,19 @@
                 <a:cs typeface="Poppins"/>
                 <a:sym typeface="Poppins"/>
               </a:rPr>
-              <a:t>Defined transaction-specific requirements through custodian templates, engaged with the custodian and implementation team, tested transaction flows and exceptions, and validated the final solution</a:t>
+              <a:t>through custodian templates, engaged with the custodian and implementation team, tested transaction flows and exceptions, and </a:t>
+            </a:r>
+            <a:r>
+              <a:rPr lang="en-US" sz="1899" b="true">
+                <a:solidFill>
+                  <a:srgbClr val="EFF1E8"/>
+                </a:solidFill>
+                <a:latin typeface="Poppins Bold"/>
+                <a:ea typeface="Poppins Bold"/>
+                <a:cs typeface="Poppins Bold"/>
+                <a:sym typeface="Poppins Bold"/>
+              </a:rPr>
+              <a:t>validated the final solution.</a:t>
             </a:r>
           </a:p>
         </p:txBody>
@@ -11097,7 +11193,55 @@
                 <a:cs typeface="Poppins"/>
                 <a:sym typeface="Poppins"/>
               </a:rPr>
-              <a:t>Worked with the implementation team to configure Kyriba templates, engaged with the FX platform provider, analysed executed trades and iterated through testing until final validation.</a:t>
+              <a:t>Worked with the implementation team to </a:t>
+            </a:r>
+            <a:r>
+              <a:rPr lang="en-US" sz="1899" b="true">
+                <a:solidFill>
+                  <a:srgbClr val="EFF1E8"/>
+                </a:solidFill>
+                <a:latin typeface="Poppins Bold"/>
+                <a:ea typeface="Poppins Bold"/>
+                <a:cs typeface="Poppins Bold"/>
+                <a:sym typeface="Poppins Bold"/>
+              </a:rPr>
+              <a:t>configure Kyriba templates</a:t>
+            </a:r>
+            <a:r>
+              <a:rPr lang="en-US" sz="1899">
+                <a:solidFill>
+                  <a:srgbClr val="EFF1E8"/>
+                </a:solidFill>
+                <a:latin typeface="Poppins"/>
+                <a:ea typeface="Poppins"/>
+                <a:cs typeface="Poppins"/>
+                <a:sym typeface="Poppins"/>
+              </a:rPr>
+              <a:t>, engaged with the FX Platform provider, analysed executed trades and iterated through</a:t>
+            </a:r>
+            <a:r>
+              <a:rPr lang="en-US" sz="1899" b="true">
+                <a:solidFill>
+                  <a:srgbClr val="EFF1E8"/>
+                </a:solidFill>
+                <a:latin typeface="Poppins Bold"/>
+                <a:ea typeface="Poppins Bold"/>
+                <a:cs typeface="Poppins Bold"/>
+                <a:sym typeface="Poppins Bold"/>
+              </a:rPr>
+              <a:t> testing until final validation</a:t>
+            </a:r>
+            <a:r>
+              <a:rPr lang="en-US" sz="1899">
+                <a:solidFill>
+                  <a:srgbClr val="EFF1E8"/>
+                </a:solidFill>
+                <a:latin typeface="Poppins"/>
+                <a:ea typeface="Poppins"/>
+                <a:cs typeface="Poppins"/>
+                <a:sym typeface="Poppins"/>
+              </a:rPr>
+              <a:t>.</a:t>
             </a:r>
           </a:p>
         </p:txBody>
@@ -11900,7 +12044,55 @@
                 <a:cs typeface="Poppins"/>
                 <a:sym typeface="Poppins"/>
               </a:rPr>
-              <a:t>Worked with Finance and the Kyriba team on financial transaction templates and configuration; reviewed, mapped and improved the setup, created procedures and documented the end-to-end process from accruals and MTM through GL entries and approval.</a:t>
+              <a:t>Refined financial transaction templates and configuration with Finance and the Kyriba team; reviewed, mapped and </a:t>
+            </a:r>
+            <a:r>
+              <a:rPr lang="en-US" sz="1899" b="true">
+                <a:solidFill>
+                  <a:srgbClr val="EFF1E8"/>
+                </a:solidFill>
+                <a:latin typeface="Poppins Bold"/>
+                <a:ea typeface="Poppins Bold"/>
+                <a:cs typeface="Poppins Bold"/>
+                <a:sym typeface="Poppins Bold"/>
+              </a:rPr>
+              <a:t>improved</a:t>
+            </a:r>
+            <a:r>
+              <a:rPr lang="en-US" sz="1899">
+                <a:solidFill>
+                  <a:srgbClr val="EFF1E8"/>
+                </a:solidFill>
+                <a:latin typeface="Poppins"/>
+                <a:ea typeface="Poppins"/>
+                <a:cs typeface="Poppins"/>
+                <a:sym typeface="Poppins"/>
+              </a:rPr>
+              <a:t> the setup, created procedures </a:t>
+            </a:r>
+            <a:r>
+              <a:rPr lang="en-US" sz="1899" b="true">
+                <a:solidFill>
+                  <a:srgbClr val="EFF1E8"/>
+                </a:solidFill>
+                <a:latin typeface="Poppins Bold"/>
+                <a:ea typeface="Poppins Bold"/>
+                <a:cs typeface="Poppins Bold"/>
+                <a:sym typeface="Poppins Bold"/>
+              </a:rPr>
+              <a:t>and documented the end-to-end process</a:t>
+            </a:r>
+            <a:r>
+              <a:rPr lang="en-US" sz="1899">
+                <a:solidFill>
+                  <a:srgbClr val="EFF1E8"/>
+                </a:solidFill>
+                <a:latin typeface="Poppins"/>
+                <a:ea typeface="Poppins"/>
+                <a:cs typeface="Poppins"/>
+                <a:sym typeface="Poppins"/>
+              </a:rPr>
+              <a:t> from accruals and MTM through GL entries and approval.</a:t>
             </a:r>
           </a:p>
         </p:txBody>
@@ -12212,6 +12404,18 @@
               </a:lnSpc>
             </a:pPr>
             <a:r>
+              <a:rPr lang="en-US" sz="1899" b="true">
+                <a:solidFill>
+                  <a:srgbClr val="EFF1E8"/>
+                </a:solidFill>
+                <a:latin typeface="Poppins Bold"/>
+                <a:ea typeface="Poppins Bold"/>
+                <a:cs typeface="Poppins Bold"/>
+                <a:sym typeface="Poppins Bold"/>
+              </a:rPr>
+              <a:t>Established the Kyriba data template required for Open API extraction</a:t>
+            </a:r>
+            <a:r>
               <a:rPr lang="en-US" sz="1899">
                 <a:solidFill>
                   <a:srgbClr val="EFF1E8"/>
@@ -12221,7 +12425,7 @@
                 <a:cs typeface="Poppins"/>
                 <a:sym typeface="Poppins"/>
               </a:rPr>
-              <a:t>Worked with IT to define the required Kyriba data template for Open API extraction; validated the output and tested the data through the data platform</a:t>
+              <a:t> with IT; checked the output and tested the data through the data platform.</a:t>
             </a:r>
           </a:p>
         </p:txBody>
@@ -12542,7 +12746,55 @@
                 <a:cs typeface="Poppins"/>
                 <a:sym typeface="Poppins"/>
               </a:rPr>
-              <a:t>Worked with Finance to define cash accounting requirements and transaction mappings; reviewed and improved configuration, documented the process from GL generation through review and approval, improved robustness and reduced ongoing maintenance.</a:t>
+              <a:t>Worked with Finance to </a:t>
+            </a:r>
+            <a:r>
+              <a:rPr lang="en-US" sz="1899" b="true">
+                <a:solidFill>
+                  <a:srgbClr val="EFF1E8"/>
+                </a:solidFill>
+                <a:latin typeface="Poppins Bold"/>
+                <a:ea typeface="Poppins Bold"/>
+                <a:cs typeface="Poppins Bold"/>
+                <a:sym typeface="Poppins Bold"/>
+              </a:rPr>
+              <a:t>define cash accounting requirements and transaction mappings</a:t>
+            </a:r>
+            <a:r>
+              <a:rPr lang="en-US" sz="1899">
+                <a:solidFill>
+                  <a:srgbClr val="EFF1E8"/>
+                </a:solidFill>
+                <a:latin typeface="Poppins"/>
+                <a:ea typeface="Poppins"/>
+                <a:cs typeface="Poppins"/>
+                <a:sym typeface="Poppins"/>
+              </a:rPr>
+              <a:t>; reviewed </a:t>
+            </a:r>
+            <a:r>
+              <a:rPr lang="en-US" sz="1899" b="true">
+                <a:solidFill>
+                  <a:srgbClr val="EFF1E8"/>
+                </a:solidFill>
+                <a:latin typeface="Poppins Bold"/>
+                <a:ea typeface="Poppins Bold"/>
+                <a:cs typeface="Poppins Bold"/>
+                <a:sym typeface="Poppins Bold"/>
+              </a:rPr>
+              <a:t>and improved configuration</a:t>
+            </a:r>
+            <a:r>
+              <a:rPr lang="en-US" sz="1899">
+                <a:solidFill>
+                  <a:srgbClr val="EFF1E8"/>
+                </a:solidFill>
+                <a:latin typeface="Poppins"/>
+                <a:ea typeface="Poppins"/>
+                <a:cs typeface="Poppins"/>
+                <a:sym typeface="Poppins"/>
+              </a:rPr>
+              <a:t>, documented the process from GL generation through review and approval, improved robustness and reduced ongoing maintenance.</a:t>
             </a:r>
           </a:p>
         </p:txBody>
@@ -13337,6 +13589,18 @@
               </a:lnSpc>
             </a:pPr>
             <a:r>
+              <a:rPr lang="en-US" sz="1899" b="true">
+                <a:solidFill>
+                  <a:srgbClr val="EFF1E8"/>
+                </a:solidFill>
+                <a:latin typeface="Poppins Bold"/>
+                <a:ea typeface="Poppins Bold"/>
+                <a:cs typeface="Poppins Bold"/>
+                <a:sym typeface="Poppins Bold"/>
+              </a:rPr>
+              <a:t>Identified additional financial transaction data requirements</a:t>
+            </a:r>
+            <a:r>
               <a:rPr lang="en-US" sz="1899">
                 <a:solidFill>
                   <a:srgbClr val="EFF1E8"/>
@@ -13346,7 +13610,7 @@
                 <a:cs typeface="Poppins"/>
                 <a:sym typeface="Poppins"/>
               </a:rPr>
-              <a:t>Defined additional financial transaction data requirements, created the data template, tested the output and validated the enhanced data set.</a:t>
+              <a:t>, created the data template, tested the output and confirmed the enhanced data set.</a:t>
             </a:r>
           </a:p>
         </p:txBody>
@@ -13677,6 +13941,18 @@
               </a:lnSpc>
             </a:pPr>
             <a:r>
+              <a:rPr lang="en-US" sz="1899" b="true">
+                <a:solidFill>
+                  <a:srgbClr val="EFF1E8"/>
+                </a:solidFill>
+                <a:latin typeface="Poppins Bold"/>
+                <a:ea typeface="Poppins Bold"/>
+                <a:cs typeface="Poppins Bold"/>
+                <a:sym typeface="Poppins Bold"/>
+              </a:rPr>
+              <a:t>Specified required market data</a:t>
+            </a:r>
+            <a:r>
               <a:rPr lang="en-US" sz="1899">
                 <a:solidFill>
                   <a:srgbClr val="EFF1E8"/>
@@ -13686,7 +13962,31 @@
                 <a:cs typeface="Poppins"/>
                 <a:sym typeface="Poppins"/>
               </a:rPr>
-              <a:t>Defined required market data, validated sources and outputs, tested and documented data requirements, and maintained new data requirements such as MMF rates</a:t>
+              <a:t>, assessed sources and outputs,  documented data requirements, and </a:t>
+            </a:r>
+            <a:r>
+              <a:rPr lang="en-US" sz="1899" b="true">
+                <a:solidFill>
+                  <a:srgbClr val="EFF1E8"/>
+                </a:solidFill>
+                <a:latin typeface="Poppins Bold"/>
+                <a:ea typeface="Poppins Bold"/>
+                <a:cs typeface="Poppins Bold"/>
+                <a:sym typeface="Poppins Bold"/>
+              </a:rPr>
+              <a:t>maintained new data requirements</a:t>
+            </a:r>
+            <a:r>
+              <a:rPr lang="en-US" sz="1899">
+                <a:solidFill>
+                  <a:srgbClr val="EFF1E8"/>
+                </a:solidFill>
+                <a:latin typeface="Poppins"/>
+                <a:ea typeface="Poppins"/>
+                <a:cs typeface="Poppins"/>
+                <a:sym typeface="Poppins"/>
+              </a:rPr>
+              <a:t> such as Money Market Funds rates</a:t>
             </a:r>
           </a:p>
         </p:txBody>
@@ -13998,6 +14298,18 @@
               </a:lnSpc>
             </a:pPr>
             <a:r>
+              <a:rPr lang="en-US" sz="1899" b="true">
+                <a:solidFill>
+                  <a:srgbClr val="EFF1E8"/>
+                </a:solidFill>
+                <a:latin typeface="Poppins Bold"/>
+                <a:ea typeface="Poppins Bold"/>
+                <a:cs typeface="Poppins Bold"/>
+                <a:sym typeface="Poppins Bold"/>
+              </a:rPr>
+              <a:t>Validated available API data</a:t>
+            </a:r>
+            <a:r>
               <a:rPr lang="en-US" sz="1899">
                 <a:solidFill>
                   <a:srgbClr val="EFF1E8"/>
@@ -14007,7 +14319,55 @@
                 <a:cs typeface="Poppins"/>
                 <a:sym typeface="Poppins"/>
               </a:rPr>
-              <a:t>Validated available API data, tested outputs and identified gaps against Treasury requirements.</a:t>
+              <a:t>, </a:t>
+            </a:r>
+            <a:r>
+              <a:rPr lang="en-US" sz="1899" b="true">
+                <a:solidFill>
+                  <a:srgbClr val="EFF1E8"/>
+                </a:solidFill>
+                <a:latin typeface="Poppins Bold"/>
+                <a:ea typeface="Poppins Bold"/>
+                <a:cs typeface="Poppins Bold"/>
+                <a:sym typeface="Poppins Bold"/>
+              </a:rPr>
+              <a:t>t</a:t>
+            </a:r>
+            <a:r>
+              <a:rPr lang="en-US" sz="1899">
+                <a:solidFill>
+                  <a:srgbClr val="EFF1E8"/>
+                </a:solidFill>
+                <a:latin typeface="Poppins"/>
+                <a:ea typeface="Poppins"/>
+                <a:cs typeface="Poppins"/>
+                <a:sym typeface="Poppins"/>
+              </a:rPr>
+              <a:t>ested outputs and</a:t>
+            </a:r>
+            <a:r>
+              <a:rPr lang="en-US" sz="1899" b="true">
+                <a:solidFill>
+                  <a:srgbClr val="EFF1E8"/>
+                </a:solidFill>
+                <a:latin typeface="Poppins Bold"/>
+                <a:ea typeface="Poppins Bold"/>
+                <a:cs typeface="Poppins Bold"/>
+                <a:sym typeface="Poppins Bold"/>
+              </a:rPr>
+              <a:t> identified gaps</a:t>
+            </a:r>
+            <a:r>
+              <a:rPr lang="en-US" sz="1899">
+                <a:solidFill>
+                  <a:srgbClr val="EFF1E8"/>
+                </a:solidFill>
+                <a:latin typeface="Poppins"/>
+                <a:ea typeface="Poppins"/>
+                <a:cs typeface="Poppins"/>
+                <a:sym typeface="Poppins"/>
+              </a:rPr>
+              <a:t> against Treasury requirements.</a:t>
             </a:r>
           </a:p>
         </p:txBody>
@@ -14715,10 +15075,10 @@
         </p:nvGrpSpPr>
         <p:grpSpPr>
           <a:xfrm rot="0">
-            <a:off x="1606995" y="5747556"/>
-            <a:ext cx="4714100" cy="1147215"/>
+            <a:off x="1606995" y="6945086"/>
+            <a:ext cx="4714100" cy="929815"/>
             <a:chOff x="0" y="0"/>
-            <a:chExt cx="1937533" cy="471515"/>
+            <a:chExt cx="1937533" cy="382161"/>
           </a:xfrm>
         </p:grpSpPr>
         <p:sp>
@@ -14730,7 +15090,7 @@
           <p:spPr>
             <a:xfrm flipH="false" flipV="false" rot="0">
               <a:off x="0" y="0"/>
-              <a:ext cx="1937533" cy="471515"/>
+              <a:ext cx="1937533" cy="382161"/>
             </a:xfrm>
             <a:custGeom>
               <a:avLst/>
@@ -14739,7 +15099,7 @@
               <a:cxnLst/>
               <a:rect r="r" b="b" t="t" l="l"/>
               <a:pathLst>
-                <a:path h="471515" w="1937533">
+                <a:path h="382161" w="1937533">
                   <a:moveTo>
                     <a:pt x="24634" y="0"/>
                   </a:moveTo>
@@ -14757,25 +15117,25 @@
                     <a:pt x="1937533" y="24634"/>
                   </a:cubicBezTo>
                   <a:lnTo>
-                    <a:pt x="1937533" y="446880"/>
+                    <a:pt x="1937533" y="357527"/>
                   </a:lnTo>
                   <a:cubicBezTo>
-                    <a:pt x="1937533" y="460486"/>
-                    <a:pt x="1926504" y="471515"/>
-                    <a:pt x="1912899" y="471515"/>
+                    <a:pt x="1937533" y="371132"/>
+                    <a:pt x="1926504" y="382161"/>
+                    <a:pt x="1912899" y="382161"/>
                   </a:cubicBezTo>
                   <a:lnTo>
-                    <a:pt x="24634" y="471515"/>
+                    <a:pt x="24634" y="382161"/>
                   </a:lnTo>
                   <a:cubicBezTo>
-                    <a:pt x="18101" y="471515"/>
-                    <a:pt x="11835" y="468919"/>
-                    <a:pt x="7215" y="464299"/>
-                  </a:cubicBezTo>
-                  <a:cubicBezTo>
-                    <a:pt x="2595" y="459680"/>
-                    <a:pt x="0" y="453414"/>
-                    <a:pt x="0" y="446880"/>
+                    <a:pt x="18101" y="382161"/>
+                    <a:pt x="11835" y="379566"/>
+                    <a:pt x="7215" y="374946"/>
+                  </a:cubicBezTo>
+                  <a:cubicBezTo>
+                    <a:pt x="2595" y="370326"/>
+                    <a:pt x="0" y="364060"/>
+                    <a:pt x="0" y="357527"/>
                   </a:cubicBezTo>
                   <a:lnTo>
                     <a:pt x="0" y="24634"/>
@@ -14815,7 +15175,7 @@
           <p:spPr>
             <a:xfrm>
               <a:off x="0" y="0"/>
-              <a:ext cx="1937533" cy="471515"/>
+              <a:ext cx="1937533" cy="382161"/>
             </a:xfrm>
             <a:prstGeom prst="rect">
               <a:avLst/>
@@ -14842,7 +15202,7 @@
         </p:nvSpPr>
         <p:spPr>
           <a:xfrm rot="0">
-            <a:off x="2196510" y="5963020"/>
+            <a:off x="2196510" y="7218538"/>
             <a:ext cx="3535071" cy="342242"/>
           </a:xfrm>
           <a:prstGeom prst="rect">
@@ -14883,10 +15243,10 @@
         </p:nvGrpSpPr>
         <p:grpSpPr>
           <a:xfrm rot="0">
-            <a:off x="7201839" y="5764037"/>
-            <a:ext cx="9205228" cy="1130734"/>
+            <a:off x="7201839" y="6961567"/>
+            <a:ext cx="9205228" cy="913333"/>
             <a:chOff x="0" y="0"/>
-            <a:chExt cx="3783423" cy="464741"/>
+            <a:chExt cx="3783423" cy="375387"/>
           </a:xfrm>
         </p:grpSpPr>
         <p:sp>
@@ -14898,7 +15258,7 @@
           <p:spPr>
             <a:xfrm flipH="false" flipV="false" rot="0">
               <a:off x="0" y="0"/>
-              <a:ext cx="3783423" cy="464741"/>
+              <a:ext cx="3783423" cy="375387"/>
             </a:xfrm>
             <a:custGeom>
               <a:avLst/>
@@ -14907,7 +15267,7 @@
               <a:cxnLst/>
               <a:rect r="r" b="b" t="t" l="l"/>
               <a:pathLst>
-                <a:path h="464741" w="3783423">
+                <a:path h="375387" w="3783423">
                   <a:moveTo>
                     <a:pt x="12616" y="0"/>
                   </a:moveTo>
@@ -14920,20 +15280,20 @@
                     <a:pt x="3783423" y="12616"/>
                   </a:cubicBezTo>
                   <a:lnTo>
-                    <a:pt x="3783423" y="452125"/>
+                    <a:pt x="3783423" y="362772"/>
                   </a:lnTo>
                   <a:cubicBezTo>
-                    <a:pt x="3783423" y="459093"/>
-                    <a:pt x="3777774" y="464741"/>
-                    <a:pt x="3770807" y="464741"/>
+                    <a:pt x="3783423" y="369739"/>
+                    <a:pt x="3777774" y="375387"/>
+                    <a:pt x="3770807" y="375387"/>
                   </a:cubicBezTo>
                   <a:lnTo>
-                    <a:pt x="12616" y="464741"/>
+                    <a:pt x="12616" y="375387"/>
                   </a:lnTo>
                   <a:cubicBezTo>
-                    <a:pt x="5648" y="464741"/>
-                    <a:pt x="0" y="459093"/>
-                    <a:pt x="0" y="452125"/>
+                    <a:pt x="5648" y="375387"/>
+                    <a:pt x="0" y="369739"/>
+                    <a:pt x="0" y="362772"/>
                   </a:cubicBezTo>
                   <a:lnTo>
                     <a:pt x="0" y="12616"/>
@@ -14968,7 +15328,7 @@
           <p:spPr>
             <a:xfrm>
               <a:off x="0" y="0"/>
-              <a:ext cx="3783423" cy="464741"/>
+              <a:ext cx="3783423" cy="375387"/>
             </a:xfrm>
             <a:prstGeom prst="rect">
               <a:avLst/>
@@ -14995,7 +15355,7 @@
         </p:nvSpPr>
         <p:spPr>
           <a:xfrm rot="0">
-            <a:off x="7602838" y="5767087"/>
+            <a:off x="7602838" y="7025266"/>
             <a:ext cx="8303778" cy="675617"/>
           </a:xfrm>
           <a:prstGeom prst="rect">
@@ -15023,7 +15383,31 @@
                 <a:cs typeface="Poppins"/>
                 <a:sym typeface="Poppins"/>
               </a:rPr>
-              <a:t>Created personalised dashboards giving clients a clear view of positions and key Treasury information.</a:t>
+              <a:t>Created </a:t>
+            </a:r>
+            <a:r>
+              <a:rPr lang="en-US" sz="1899" b="true">
+                <a:solidFill>
+                  <a:srgbClr val="EFF1E8"/>
+                </a:solidFill>
+                <a:latin typeface="Poppins Bold"/>
+                <a:ea typeface="Poppins Bold"/>
+                <a:cs typeface="Poppins Bold"/>
+                <a:sym typeface="Poppins Bold"/>
+              </a:rPr>
+              <a:t>personalised dashboards</a:t>
+            </a:r>
+            <a:r>
+              <a:rPr lang="en-US" sz="1899">
+                <a:solidFill>
+                  <a:srgbClr val="EFF1E8"/>
+                </a:solidFill>
+                <a:latin typeface="Poppins"/>
+                <a:ea typeface="Poppins"/>
+                <a:cs typeface="Poppins"/>
+                <a:sym typeface="Poppins"/>
+              </a:rPr>
+              <a:t> giving clients a clear view of positions and key Treasury information.</a:t>
             </a:r>
           </a:p>
         </p:txBody>
@@ -15036,7 +15420,7 @@
         </p:nvGrpSpPr>
         <p:grpSpPr>
           <a:xfrm rot="0">
-            <a:off x="1606995" y="7142421"/>
+            <a:off x="1606995" y="8170176"/>
             <a:ext cx="4714100" cy="1056370"/>
             <a:chOff x="0" y="0"/>
             <a:chExt cx="1937533" cy="434176"/>
@@ -15163,7 +15547,7 @@
         </p:nvSpPr>
         <p:spPr>
           <a:xfrm rot="0">
-            <a:off x="2190665" y="7137523"/>
+            <a:off x="2196510" y="8510455"/>
             <a:ext cx="3535071" cy="342242"/>
           </a:xfrm>
           <a:prstGeom prst="rect">
@@ -15204,7 +15588,7 @@
         </p:nvGrpSpPr>
         <p:grpSpPr>
           <a:xfrm rot="0">
-            <a:off x="7201839" y="7154212"/>
+            <a:off x="7201839" y="8181967"/>
             <a:ext cx="9205228" cy="1056370"/>
             <a:chOff x="0" y="0"/>
             <a:chExt cx="3783423" cy="434176"/>
@@ -15316,7 +15700,7 @@
         </p:nvSpPr>
         <p:spPr>
           <a:xfrm rot="0">
-            <a:off x="7602838" y="7150918"/>
+            <a:off x="7602838" y="8331977"/>
             <a:ext cx="8303778" cy="675617"/>
           </a:xfrm>
           <a:prstGeom prst="rect">
@@ -15335,6 +15719,18 @@
               </a:lnSpc>
             </a:pPr>
             <a:r>
+              <a:rPr lang="en-US" sz="1899" b="true">
+                <a:solidFill>
+                  <a:srgbClr val="EFF1E8"/>
+                </a:solidFill>
+                <a:latin typeface="Poppins Bold"/>
+                <a:ea typeface="Poppins Bold"/>
+                <a:cs typeface="Poppins Bold"/>
+                <a:sym typeface="Poppins Bold"/>
+              </a:rPr>
+              <a:t>Built tailored views and templates</a:t>
+            </a:r>
+            <a:r>
               <a:rPr lang="en-US" sz="1899">
                 <a:solidFill>
                   <a:srgbClr val="EFF1E8"/>
@@ -15344,7 +15740,7 @@
                 <a:cs typeface="Poppins"/>
                 <a:sym typeface="Poppins"/>
               </a:rPr>
-              <a:t>Built tailored views and templates for new, historical and outstanding trades, improving visibility and day-to-day monitoring.</a:t>
+              <a:t> for new, historical and outstanding trades, improving visibility and day-to-day monitoring.</a:t>
             </a:r>
           </a:p>
         </p:txBody>
@@ -15484,7 +15880,7 @@
         </p:nvSpPr>
         <p:spPr>
           <a:xfrm rot="0">
-            <a:off x="2190665" y="4571066"/>
+            <a:off x="2196510" y="4745179"/>
             <a:ext cx="3535071" cy="342242"/>
           </a:xfrm>
           <a:prstGeom prst="rect">
@@ -15637,7 +16033,7 @@
         </p:nvSpPr>
         <p:spPr>
           <a:xfrm rot="0">
-            <a:off x="7602838" y="4520058"/>
+            <a:off x="7602838" y="4570502"/>
             <a:ext cx="8303778" cy="675617"/>
           </a:xfrm>
           <a:prstGeom prst="rect">
@@ -15656,6 +16052,18 @@
               </a:lnSpc>
             </a:pPr>
             <a:r>
+              <a:rPr lang="en-US" sz="1899" b="true">
+                <a:solidFill>
+                  <a:srgbClr val="EFF1E8"/>
+                </a:solidFill>
+                <a:latin typeface="Poppins Bold"/>
+                <a:ea typeface="Poppins Bold"/>
+                <a:cs typeface="Poppins Bold"/>
+                <a:sym typeface="Poppins Bold"/>
+              </a:rPr>
+              <a:t>Simplified menu structures</a:t>
+            </a:r>
+            <a:r>
               <a:rPr lang="en-US" sz="1899">
                 <a:solidFill>
                   <a:srgbClr val="EFF1E8"/>
@@ -15665,7 +16073,7 @@
                 <a:cs typeface="Poppins"/>
                 <a:sym typeface="Poppins"/>
               </a:rPr>
-              <a:t>Simplified menu structures and created shortcuts to make frequently used functions easier to access.</a:t>
+              <a:t> and created shortcuts to make frequently used functions easier to access.</a:t>
             </a:r>
           </a:p>
         </p:txBody>
@@ -15678,7 +16086,7 @@
         </p:nvGrpSpPr>
         <p:grpSpPr>
           <a:xfrm rot="0">
-            <a:off x="1606995" y="8467757"/>
+            <a:off x="1606995" y="5674128"/>
             <a:ext cx="4714100" cy="1056370"/>
             <a:chOff x="0" y="0"/>
             <a:chExt cx="1937533" cy="434176"/>
@@ -15805,7 +16213,7 @@
         </p:nvSpPr>
         <p:spPr>
           <a:xfrm rot="0">
-            <a:off x="2190665" y="8462858"/>
+            <a:off x="2190665" y="6002617"/>
             <a:ext cx="3535071" cy="342242"/>
           </a:xfrm>
           <a:prstGeom prst="rect">
@@ -15846,7 +16254,7 @@
         </p:nvGrpSpPr>
         <p:grpSpPr>
           <a:xfrm rot="0">
-            <a:off x="7201839" y="8479548"/>
+            <a:off x="7201839" y="5685919"/>
             <a:ext cx="9205228" cy="1056370"/>
             <a:chOff x="0" y="0"/>
             <a:chExt cx="3783423" cy="434176"/>
@@ -15958,7 +16366,7 @@
         </p:nvSpPr>
         <p:spPr>
           <a:xfrm rot="0">
-            <a:off x="7602838" y="8476254"/>
+            <a:off x="7602838" y="5814737"/>
             <a:ext cx="8303778" cy="675617"/>
           </a:xfrm>
           <a:prstGeom prst="rect">
@@ -15977,6 +16385,18 @@
               </a:lnSpc>
             </a:pPr>
             <a:r>
+              <a:rPr lang="en-US" sz="1899" b="true">
+                <a:solidFill>
+                  <a:srgbClr val="EFF1E8"/>
+                </a:solidFill>
+                <a:latin typeface="Poppins Bold"/>
+                <a:ea typeface="Poppins Bold"/>
+                <a:cs typeface="Poppins Bold"/>
+                <a:sym typeface="Poppins Bold"/>
+              </a:rPr>
+              <a:t>Tailored personalised input screens</a:t>
+            </a:r>
+            <a:r>
               <a:rPr lang="en-US" sz="1899">
                 <a:solidFill>
                   <a:srgbClr val="EFF1E8"/>
@@ -15986,7 +16406,7 @@
                 <a:cs typeface="Poppins"/>
                 <a:sym typeface="Poppins"/>
               </a:rPr>
-              <a:t>Created personalised input screens based on transaction type and user requirements.</a:t>
+              <a:t> based on transaction type and user requirements.</a:t>
             </a:r>
           </a:p>
         </p:txBody>
@@ -16557,8 +16977,8 @@
         </p:nvSpPr>
         <p:spPr>
           <a:xfrm rot="0">
-            <a:off x="1961364" y="6118544"/>
-            <a:ext cx="3999517" cy="675617"/>
+            <a:off x="1964287" y="5951856"/>
+            <a:ext cx="3999517" cy="1008992"/>
           </a:xfrm>
           <a:prstGeom prst="rect">
             <a:avLst/>
@@ -16585,7 +17005,7 @@
                 <a:cs typeface="Poppins"/>
                 <a:sym typeface="Poppins"/>
               </a:rPr>
-              <a:t>Automated Trade Confirmations — CSV &amp; Email Delivery</a:t>
+              <a:t>Automated Trade Confirmations — CSV Distribution to Fund Administrators</a:t>
             </a:r>
           </a:p>
         </p:txBody>
@@ -16729,6 +17149,18 @@
               </a:lnSpc>
             </a:pPr>
             <a:r>
+              <a:rPr lang="en-US" sz="1899" b="true">
+                <a:solidFill>
+                  <a:srgbClr val="EFF1E8"/>
+                </a:solidFill>
+                <a:latin typeface="Poppins Bold"/>
+                <a:ea typeface="Poppins Bold"/>
+                <a:cs typeface="Poppins Bold"/>
+                <a:sym typeface="Poppins Bold"/>
+              </a:rPr>
+              <a:t>Designed and validated the trade-confirmation workflow</a:t>
+            </a:r>
+            <a:r>
               <a:rPr lang="en-US" sz="1899">
                 <a:solidFill>
                   <a:srgbClr val="EFF1E8"/>
@@ -16738,7 +17170,31 @@
                 <a:cs typeface="Poppins"/>
                 <a:sym typeface="Poppins"/>
               </a:rPr>
-              <a:t>Designed and validated the trade-confirmation workflow, including CSV output and email-only recipients, enabling automated distribution to fund administrators without consuming full user licences.</a:t>
+              <a:t>, including CSV output and email-only users, enabling automated distribution to fund administrators </a:t>
+            </a:r>
+            <a:r>
+              <a:rPr lang="en-US" sz="1899" b="true">
+                <a:solidFill>
+                  <a:srgbClr val="EFF1E8"/>
+                </a:solidFill>
+                <a:latin typeface="Poppins Bold"/>
+                <a:ea typeface="Poppins Bold"/>
+                <a:cs typeface="Poppins Bold"/>
+                <a:sym typeface="Poppins Bold"/>
+              </a:rPr>
+              <a:t>without requiring full user licences</a:t>
+            </a:r>
+            <a:r>
+              <a:rPr lang="en-US" sz="1899">
+                <a:solidFill>
+                  <a:srgbClr val="EFF1E8"/>
+                </a:solidFill>
+                <a:latin typeface="Poppins"/>
+                <a:ea typeface="Poppins"/>
+                <a:cs typeface="Poppins"/>
+                <a:sym typeface="Poppins"/>
+              </a:rPr>
+              <a:t>.</a:t>
             </a:r>
           </a:p>
         </p:txBody>
@@ -17050,6 +17506,18 @@
               </a:lnSpc>
             </a:pPr>
             <a:r>
+              <a:rPr lang="en-US" sz="1899" b="true">
+                <a:solidFill>
+                  <a:srgbClr val="EFF1E8"/>
+                </a:solidFill>
+                <a:latin typeface="Poppins Bold"/>
+                <a:ea typeface="Poppins Bold"/>
+                <a:cs typeface="Poppins Bold"/>
+                <a:sym typeface="Poppins Bold"/>
+              </a:rPr>
+              <a:t>Designed reporting requirements and automated recurring delivery</a:t>
+            </a:r>
+            <a:r>
               <a:rPr lang="en-US" sz="1899">
                 <a:solidFill>
                   <a:srgbClr val="EFF1E8"/>
@@ -17059,7 +17527,7 @@
                 <a:cs typeface="Poppins"/>
                 <a:sym typeface="Poppins"/>
               </a:rPr>
-              <a:t>Designed reporting requirements and automated delivery processes, ensuring clients received the information they needed without manual intervention.</a:t>
+              <a:t>, ensuring clients received the information they needed without manual intervention.</a:t>
             </a:r>
           </a:p>
         </p:txBody>
@@ -17256,7 +17724,7 @@
         <p:spPr>
           <a:xfrm rot="0">
             <a:off x="1028700" y="3894115"/>
-            <a:ext cx="8260461" cy="1844088"/>
+            <a:ext cx="8260461" cy="1425575"/>
           </a:xfrm>
           <a:prstGeom prst="rect">
             <a:avLst/>
@@ -17283,7 +17751,7 @@
                 <a:cs typeface="Poppins"/>
                 <a:sym typeface="Poppins"/>
               </a:rPr>
-              <a:t>This initiative delivered a full end‑to‑end implementation of the Kyriba Treasury Management System, covering everything from initial TMS selection through blueprinting, core data configuration, access setup, integrations, and value‑added process improvements.</a:t>
+              <a:t>This initiative delivered an end-to-end implementation of Kyriba Treasury Management System (TMS), covering TMS selection, blueprinting, core data configuration, access setup, integrations, and targeted process improvements.</a:t>
             </a:r>
           </a:p>
         </p:txBody>
@@ -18322,7 +18790,7 @@
                 <a:cs typeface="Poppins Bold"/>
                 <a:sym typeface="Poppins Bold"/>
               </a:rPr>
-              <a:t>Blueprinting &amp; Funtional Design</a:t>
+              <a:t>Blueprinting &amp; Functional Design</a:t>
             </a:r>
           </a:p>
         </p:txBody>
@@ -19060,7 +19528,7 @@
                 <a:cs typeface="Poppins Bold"/>
                 <a:sym typeface="Poppins Bold"/>
               </a:rPr>
-              <a:t>tional lead and technical validator.</a:t>
+              <a:t>tional lead and solution validator.</a:t>
             </a:r>
           </a:p>
         </p:txBody>
@@ -19757,7 +20225,7 @@
         <p:spPr>
           <a:xfrm rot="0">
             <a:off x="1145139" y="4616554"/>
-            <a:ext cx="6724609" cy="3530821"/>
+            <a:ext cx="6724609" cy="3530600"/>
           </a:xfrm>
           <a:prstGeom prst="rect">
             <a:avLst/>
@@ -19808,7 +20276,7 @@
                 <a:cs typeface="Poppins"/>
                 <a:sym typeface="Poppins"/>
               </a:rPr>
-              <a:t>treasury SME,  deep understanding of operational treasury processes, requirements and pain points</a:t>
+              <a:t>Treasury SME with a deep understanding of operational Treasury processes, requirements and pain points</a:t>
             </a:r>
           </a:p>
           <a:p>
@@ -20652,7 +21120,19 @@
                 <a:cs typeface="Poppins"/>
                 <a:sym typeface="Poppins"/>
               </a:rPr>
-              <a:t>Defined functional behaviour, rules and configuration requirements</a:t>
+              <a:t>Establ</a:t>
+            </a:r>
+            <a:r>
+              <a:rPr lang="en-US" sz="1899">
+                <a:solidFill>
+                  <a:srgbClr val="70A1BD"/>
+                </a:solidFill>
+                <a:latin typeface="Poppins"/>
+                <a:ea typeface="Poppins"/>
+                <a:cs typeface="Poppins"/>
+                <a:sym typeface="Poppins"/>
+              </a:rPr>
+              <a:t>ished functional behaviour, rules and configuration requirements</a:t>
             </a:r>
           </a:p>
           <a:p>
@@ -20843,7 +21323,7 @@
         <p:spPr>
           <a:xfrm rot="0">
             <a:off x="2562368" y="3864944"/>
-            <a:ext cx="5926626" cy="2009141"/>
+            <a:ext cx="5926626" cy="1675766"/>
           </a:xfrm>
           <a:prstGeom prst="rect">
             <a:avLst/>
@@ -20870,7 +21350,7 @@
                 <a:cs typeface="Poppins"/>
                 <a:sym typeface="Poppins"/>
               </a:rPr>
-              <a:t>Documen</a:t>
+              <a:t>Cap</a:t>
             </a:r>
             <a:r>
               <a:rPr lang="en-US" sz="1899">
@@ -20882,7 +21362,7 @@
                 <a:cs typeface="Poppins"/>
                 <a:sym typeface="Poppins"/>
               </a:rPr>
-              <a:t>ted detailed operational requirements</a:t>
+              <a:t>tured detailed operational requirements</a:t>
             </a:r>
           </a:p>
           <a:p>
@@ -20920,15 +21400,20 @@
                 <a:cs typeface="Poppins"/>
                 <a:sym typeface="Poppins"/>
               </a:rPr>
-              <a:t>Translated Treasury needs into functional specifications</a:t>
-            </a:r>
-          </a:p>
-          <a:p>
-            <a:pPr algn="l">
-              <a:lnSpc>
-                <a:spcPts val="2658"/>
-              </a:lnSpc>
-            </a:pPr>
+              <a:t>Co</a:t>
+            </a:r>
+            <a:r>
+              <a:rPr lang="en-US" sz="1899">
+                <a:solidFill>
+                  <a:srgbClr val="70A1BD"/>
+                </a:solidFill>
+                <a:latin typeface="Poppins"/>
+                <a:ea typeface="Poppins"/>
+                <a:cs typeface="Poppins"/>
+                <a:sym typeface="Poppins"/>
+              </a:rPr>
+              <a:t>nverted Treasury needs into functional specifications</a:t>
+            </a:r>
           </a:p>
         </p:txBody>
       </p:sp>
@@ -21145,7 +21630,19 @@
                 <a:cs typeface="Poppins"/>
                 <a:sym typeface="Poppins"/>
               </a:rPr>
-              <a:t>Defined approval and control points</a:t>
+              <a:t>Establ</a:t>
+            </a:r>
+            <a:r>
+              <a:rPr lang="en-US" sz="1899">
+                <a:solidFill>
+                  <a:srgbClr val="70A1BD"/>
+                </a:solidFill>
+                <a:latin typeface="Poppins"/>
+                <a:ea typeface="Poppins"/>
+                <a:cs typeface="Poppins"/>
+                <a:sym typeface="Poppins"/>
+              </a:rPr>
+              <a:t>ished approval and control points</a:t>
             </a:r>
           </a:p>
           <a:p>
@@ -22044,7 +22541,7 @@
         <p:spPr>
           <a:xfrm rot="0">
             <a:off x="1866258" y="5205460"/>
-            <a:ext cx="6750809" cy="2121058"/>
+            <a:ext cx="6750809" cy="2120925"/>
           </a:xfrm>
           <a:prstGeom prst="rect">
             <a:avLst/>
@@ -22071,7 +22568,7 @@
                 <a:cs typeface="Poppins"/>
                 <a:sym typeface="Poppins"/>
               </a:rPr>
-              <a:t>Completed and validated Kyriba-provided templates for entities, banks, bank accounts and third parties</a:t>
+              <a:t>Completed and quality-checked Kyriba-provided templates for entities, banks, bank accounts and third parties</a:t>
             </a:r>
           </a:p>
           <a:p>
@@ -22121,7 +22618,19 @@
                 <a:cs typeface="Poppins"/>
                 <a:sym typeface="Poppins"/>
               </a:rPr>
-              <a:t>Validated data structures against Treasury operating requirements</a:t>
+              <a:t>Conf</a:t>
+            </a:r>
+            <a:r>
+              <a:rPr lang="en-US" sz="1998">
+                <a:solidFill>
+                  <a:srgbClr val="EFF1E8"/>
+                </a:solidFill>
+                <a:latin typeface="Poppins"/>
+                <a:ea typeface="Poppins"/>
+                <a:cs typeface="Poppins"/>
+                <a:sym typeface="Poppins"/>
+              </a:rPr>
+              <a:t>irmed data structures aligned with Treasury operating requirements</a:t>
             </a:r>
           </a:p>
         </p:txBody>
@@ -22188,7 +22697,7 @@
         <p:spPr>
           <a:xfrm rot="0">
             <a:off x="10067458" y="5205460"/>
-            <a:ext cx="6875202" cy="1768585"/>
+            <a:ext cx="6875202" cy="1768475"/>
           </a:xfrm>
           <a:prstGeom prst="rect">
             <a:avLst/>
@@ -22215,7 +22724,7 @@
                 <a:cs typeface="Poppins"/>
                 <a:sym typeface="Poppins"/>
               </a:rPr>
-              <a:t>Defined main and system currencies</a:t>
+              <a:t>Set main and system currencies</a:t>
             </a:r>
           </a:p>
           <a:p>
@@ -22253,7 +22762,19 @@
                 <a:cs typeface="Poppins"/>
                 <a:sym typeface="Poppins"/>
               </a:rPr>
-              <a:t>Defined product subscriptions according to business and user requirements</a:t>
+              <a:t>Al</a:t>
+            </a:r>
+            <a:r>
+              <a:rPr lang="en-US" sz="1998">
+                <a:solidFill>
+                  <a:srgbClr val="EFF1E8"/>
+                </a:solidFill>
+                <a:latin typeface="Poppins"/>
+                <a:ea typeface="Poppins"/>
+                <a:cs typeface="Poppins"/>
+                <a:sym typeface="Poppins"/>
+              </a:rPr>
+              <a:t>igned product subscriptions with business and user requirements</a:t>
             </a:r>
           </a:p>
         </p:txBody>
@@ -22320,7 +22841,7 @@
         <p:spPr>
           <a:xfrm rot="0">
             <a:off x="5001832" y="7971470"/>
-            <a:ext cx="7093474" cy="1416138"/>
+            <a:ext cx="7093474" cy="1416050"/>
           </a:xfrm>
           <a:prstGeom prst="rect">
             <a:avLst/>
@@ -22366,7 +22887,19 @@
                 <a:cs typeface="Poppins"/>
                 <a:sym typeface="Poppins"/>
               </a:rPr>
-              <a:t>Validated configuration against business requirements</a:t>
+              <a:t>Check</a:t>
+            </a:r>
+            <a:r>
+              <a:rPr lang="en-US" sz="1998">
+                <a:solidFill>
+                  <a:srgbClr val="EFF1E8"/>
+                </a:solidFill>
+                <a:latin typeface="Poppins"/>
+                <a:ea typeface="Poppins"/>
+                <a:cs typeface="Poppins"/>
+                <a:sym typeface="Poppins"/>
+              </a:rPr>
+              <a:t>ed configuration against business requirements</a:t>
             </a:r>
           </a:p>
           <a:p>
